--- a/assets/downloads/cici-UCSS-pi-poster-template-2026.pptx
+++ b/assets/downloads/cici-UCSS-pi-poster-template-2026.pptx
@@ -8,7 +8,7 @@
     <p:notesMasterId r:id="rId3"/>
   </p:notesMasterIdLst>
   <p:sldIdLst>
-    <p:sldId id="258" r:id="rId2"/>
+    <p:sldId id="259" r:id="rId2"/>
   </p:sldIdLst>
   <p:sldSz cx="31089600" cy="36576000"/>
   <p:notesSz cx="6858000" cy="9144000"/>
@@ -507,7 +507,7 @@
         </p:nvSpPr>
         <p:spPr>
           <a:xfrm>
-            <a:off x="1483924" y="747213"/>
+            <a:off x="1510817" y="747213"/>
             <a:ext cx="28333428" cy="3155591"/>
           </a:xfrm>
           <a:prstGeom prst="rect">
@@ -548,7 +548,7 @@
         </p:nvSpPr>
         <p:spPr>
           <a:xfrm>
-            <a:off x="1537712" y="5349773"/>
+            <a:off x="1510817" y="5349773"/>
             <a:ext cx="28333428" cy="1400005"/>
           </a:xfrm>
           <a:prstGeom prst="rect">
@@ -592,7 +592,7 @@
         </p:nvSpPr>
         <p:spPr>
           <a:xfrm>
-            <a:off x="1483924" y="4001336"/>
+            <a:off x="1510817" y="4001336"/>
             <a:ext cx="28333428" cy="1079498"/>
           </a:xfrm>
           <a:prstGeom prst="rect">
@@ -636,7 +636,7 @@
         </p:nvSpPr>
         <p:spPr>
           <a:xfrm>
-            <a:off x="1483924" y="19827116"/>
+            <a:off x="1510817" y="19827116"/>
             <a:ext cx="28333429" cy="5080000"/>
           </a:xfrm>
           <a:prstGeom prst="rect">
@@ -734,8 +734,8 @@
         </p:nvSpPr>
         <p:spPr>
           <a:xfrm>
-            <a:off x="10976095" y="25924040"/>
-            <a:ext cx="9137409" cy="7644323"/>
+            <a:off x="11108827" y="25742482"/>
+            <a:ext cx="9137409" cy="7805686"/>
           </a:xfrm>
           <a:prstGeom prst="rect">
             <a:avLst/>
@@ -848,7 +848,7 @@
         </p:nvSpPr>
         <p:spPr>
           <a:xfrm>
-            <a:off x="1483923" y="11670716"/>
+            <a:off x="1510817" y="11670716"/>
             <a:ext cx="28333429" cy="7741736"/>
           </a:xfrm>
           <a:prstGeom prst="rect">
@@ -969,8 +969,8 @@
         </p:nvSpPr>
         <p:spPr>
           <a:xfrm>
-            <a:off x="1743994" y="25816463"/>
-            <a:ext cx="8877338" cy="7805687"/>
+            <a:off x="1510817" y="25742480"/>
+            <a:ext cx="9134856" cy="7805687"/>
           </a:xfrm>
           <a:prstGeom prst="rect">
             <a:avLst/>
@@ -1090,8 +1090,8 @@
         </p:nvSpPr>
         <p:spPr>
           <a:xfrm>
-            <a:off x="20679943" y="25944236"/>
-            <a:ext cx="9137409" cy="7603932"/>
+            <a:off x="20709390" y="25742479"/>
+            <a:ext cx="9137409" cy="7805687"/>
           </a:xfrm>
           <a:prstGeom prst="rect">
             <a:avLst/>
@@ -1204,7 +1204,7 @@
         </p:nvSpPr>
         <p:spPr>
           <a:xfrm>
-            <a:off x="1483924" y="8096624"/>
+            <a:off x="1510817" y="8096624"/>
             <a:ext cx="28333429" cy="3089440"/>
           </a:xfrm>
           <a:prstGeom prst="rect">
@@ -1935,10 +1935,10 @@
       </p:grpSpPr>
       <p:sp>
         <p:nvSpPr>
-          <p:cNvPr id="14" name="Title 13">
+          <p:cNvPr id="2" name="Title 1">
             <a:extLst>
               <a:ext uri="{FF2B5EF4-FFF2-40B4-BE49-F238E27FC236}">
-                <a16:creationId xmlns:a16="http://schemas.microsoft.com/office/drawing/2014/main" id="{09017078-4B12-9245-882C-7504E078825A}"/>
+                <a16:creationId xmlns:a16="http://schemas.microsoft.com/office/drawing/2014/main" id="{1EA1E328-EE5E-38B7-AD8C-ADBFC6D51663}"/>
               </a:ext>
             </a:extLst>
           </p:cNvPr>
@@ -1960,10 +1960,10 @@
       </p:sp>
       <p:sp>
         <p:nvSpPr>
-          <p:cNvPr id="15" name="Text Placeholder 14">
+          <p:cNvPr id="3" name="Text Placeholder 2">
             <a:extLst>
               <a:ext uri="{FF2B5EF4-FFF2-40B4-BE49-F238E27FC236}">
-                <a16:creationId xmlns:a16="http://schemas.microsoft.com/office/drawing/2014/main" id="{A5BBDF55-3C22-6C45-97D6-C341840652E2}"/>
+                <a16:creationId xmlns:a16="http://schemas.microsoft.com/office/drawing/2014/main" id="{C7C432B1-BD60-EBEE-66D7-C5404C23D6F8}"/>
               </a:ext>
             </a:extLst>
           </p:cNvPr>
@@ -1979,16 +1979,16 @@
           <a:bodyPr/>
           <a:lstStyle/>
           <a:p>
-            <a:endParaRPr lang="en-US" dirty="0"/>
+            <a:endParaRPr lang="en-US"/>
           </a:p>
         </p:txBody>
       </p:sp>
       <p:sp>
         <p:nvSpPr>
-          <p:cNvPr id="16" name="Text Placeholder 15">
+          <p:cNvPr id="4" name="Text Placeholder 3">
             <a:extLst>
               <a:ext uri="{FF2B5EF4-FFF2-40B4-BE49-F238E27FC236}">
-                <a16:creationId xmlns:a16="http://schemas.microsoft.com/office/drawing/2014/main" id="{3215BA45-653D-A740-9AE6-B08AF807E6BA}"/>
+                <a16:creationId xmlns:a16="http://schemas.microsoft.com/office/drawing/2014/main" id="{1BCD15CA-DB36-4F33-EAD1-83F8B2B526DC}"/>
               </a:ext>
             </a:extLst>
           </p:cNvPr>
@@ -2010,10 +2010,10 @@
       </p:sp>
       <p:sp>
         <p:nvSpPr>
-          <p:cNvPr id="17" name="Content Placeholder 16">
+          <p:cNvPr id="5" name="Content Placeholder 4">
             <a:extLst>
               <a:ext uri="{FF2B5EF4-FFF2-40B4-BE49-F238E27FC236}">
-                <a16:creationId xmlns:a16="http://schemas.microsoft.com/office/drawing/2014/main" id="{5800D70B-D3D9-B747-91C3-742ABBD61BF4}"/>
+                <a16:creationId xmlns:a16="http://schemas.microsoft.com/office/drawing/2014/main" id="{F70D050D-5713-B285-658D-100AFB1CD015}"/>
               </a:ext>
             </a:extLst>
           </p:cNvPr>
@@ -2035,10 +2035,10 @@
       </p:sp>
       <p:sp>
         <p:nvSpPr>
-          <p:cNvPr id="18" name="Content Placeholder 17">
+          <p:cNvPr id="6" name="Content Placeholder 5">
             <a:extLst>
               <a:ext uri="{FF2B5EF4-FFF2-40B4-BE49-F238E27FC236}">
-                <a16:creationId xmlns:a16="http://schemas.microsoft.com/office/drawing/2014/main" id="{F2CA2ED7-343B-5E4D-8E26-7D30B108F679}"/>
+                <a16:creationId xmlns:a16="http://schemas.microsoft.com/office/drawing/2014/main" id="{02FF7BD8-E4A7-4A81-FA43-9483E89E351B}"/>
               </a:ext>
             </a:extLst>
           </p:cNvPr>
@@ -2060,10 +2060,10 @@
       </p:sp>
       <p:sp>
         <p:nvSpPr>
-          <p:cNvPr id="19" name="Content Placeholder 18">
+          <p:cNvPr id="7" name="Content Placeholder 6">
             <a:extLst>
               <a:ext uri="{FF2B5EF4-FFF2-40B4-BE49-F238E27FC236}">
-                <a16:creationId xmlns:a16="http://schemas.microsoft.com/office/drawing/2014/main" id="{A691B863-EED5-7640-B34C-B389DD69C3C6}"/>
+                <a16:creationId xmlns:a16="http://schemas.microsoft.com/office/drawing/2014/main" id="{64707CAA-87F4-7AB5-EBB1-ADC1E5599326}"/>
               </a:ext>
             </a:extLst>
           </p:cNvPr>
@@ -2085,10 +2085,10 @@
       </p:sp>
       <p:sp>
         <p:nvSpPr>
-          <p:cNvPr id="20" name="Content Placeholder 19">
+          <p:cNvPr id="8" name="Content Placeholder 7">
             <a:extLst>
               <a:ext uri="{FF2B5EF4-FFF2-40B4-BE49-F238E27FC236}">
-                <a16:creationId xmlns:a16="http://schemas.microsoft.com/office/drawing/2014/main" id="{E18E915D-4082-2441-B0A3-F40619ABE1D0}"/>
+                <a16:creationId xmlns:a16="http://schemas.microsoft.com/office/drawing/2014/main" id="{DFA97EAE-DA94-4105-AEFE-B8F084CED2E4}"/>
               </a:ext>
             </a:extLst>
           </p:cNvPr>
@@ -2110,10 +2110,10 @@
       </p:sp>
       <p:sp>
         <p:nvSpPr>
-          <p:cNvPr id="21" name="Content Placeholder 20">
+          <p:cNvPr id="9" name="Content Placeholder 8">
             <a:extLst>
               <a:ext uri="{FF2B5EF4-FFF2-40B4-BE49-F238E27FC236}">
-                <a16:creationId xmlns:a16="http://schemas.microsoft.com/office/drawing/2014/main" id="{B40800FA-972E-B04D-A145-322861F30463}"/>
+                <a16:creationId xmlns:a16="http://schemas.microsoft.com/office/drawing/2014/main" id="{B7ABBBA2-298A-E91F-534B-BF3E1BCAFBCD}"/>
               </a:ext>
             </a:extLst>
           </p:cNvPr>
@@ -2121,18 +2121,10 @@
             <a:spLocks noGrp="1"/>
           </p:cNvSpPr>
           <p:nvPr>
-            <p:ph sz="half" idx="4294967295"/>
+            <p:ph sz="half" idx="23"/>
           </p:nvPr>
         </p:nvSpPr>
-        <p:spPr>
-          <a:xfrm>
-            <a:off x="11095164" y="25487723"/>
-            <a:ext cx="9137409" cy="7603932"/>
-          </a:xfrm>
-          <a:prstGeom prst="rect">
-            <a:avLst/>
-          </a:prstGeom>
-        </p:spPr>
+        <p:spPr/>
         <p:txBody>
           <a:bodyPr/>
           <a:lstStyle/>
@@ -2143,10 +2135,10 @@
       </p:sp>
       <p:sp>
         <p:nvSpPr>
-          <p:cNvPr id="22" name="Content Placeholder 21">
+          <p:cNvPr id="10" name="Content Placeholder 9">
             <a:extLst>
               <a:ext uri="{FF2B5EF4-FFF2-40B4-BE49-F238E27FC236}">
-                <a16:creationId xmlns:a16="http://schemas.microsoft.com/office/drawing/2014/main" id="{C7A5D4FD-9CC3-2D48-826B-8D1C4F4DC0B3}"/>
+                <a16:creationId xmlns:a16="http://schemas.microsoft.com/office/drawing/2014/main" id="{90884754-4682-36A0-1CDF-AEEEE43D427B}"/>
               </a:ext>
             </a:extLst>
           </p:cNvPr>
@@ -2154,435 +2146,22 @@
             <a:spLocks noGrp="1"/>
           </p:cNvSpPr>
           <p:nvPr>
-            <p:ph sz="half" idx="4294967295"/>
+            <p:ph sz="half" idx="25"/>
           </p:nvPr>
         </p:nvSpPr>
-        <p:spPr>
-          <a:xfrm>
-            <a:off x="20679945" y="25487723"/>
-            <a:ext cx="9137409" cy="7603932"/>
-          </a:xfrm>
-          <a:prstGeom prst="rect">
-            <a:avLst/>
-          </a:prstGeom>
-        </p:spPr>
+        <p:spPr/>
         <p:txBody>
           <a:bodyPr/>
           <a:lstStyle/>
           <a:p>
             <a:endParaRPr lang="en-US"/>
-          </a:p>
-        </p:txBody>
-      </p:sp>
-      <p:sp>
-        <p:nvSpPr>
-          <p:cNvPr id="23" name="Content Placeholder 22">
-            <a:extLst>
-              <a:ext uri="{FF2B5EF4-FFF2-40B4-BE49-F238E27FC236}">
-                <a16:creationId xmlns:a16="http://schemas.microsoft.com/office/drawing/2014/main" id="{95021A7A-D49B-AE44-A9A4-A42E89A41938}"/>
-              </a:ext>
-            </a:extLst>
-          </p:cNvPr>
-          <p:cNvSpPr>
-            <a:spLocks noGrp="1"/>
-          </p:cNvSpPr>
-          <p:nvPr>
-            <p:ph sz="half" idx="4294967295"/>
-          </p:nvPr>
-        </p:nvSpPr>
-        <p:spPr>
-          <a:xfrm>
-            <a:off x="1483924" y="8096624"/>
-            <a:ext cx="28333429" cy="3089440"/>
-          </a:xfrm>
-          <a:prstGeom prst="rect">
-            <a:avLst/>
-          </a:prstGeom>
-        </p:spPr>
-        <p:txBody>
-          <a:bodyPr/>
-          <a:lstStyle/>
-          <a:p>
-            <a:endParaRPr lang="en-US"/>
-          </a:p>
-        </p:txBody>
-      </p:sp>
-      <p:sp>
-        <p:nvSpPr>
-          <p:cNvPr id="24" name="Picture Placeholder 23">
-            <a:extLst>
-              <a:ext uri="{FF2B5EF4-FFF2-40B4-BE49-F238E27FC236}">
-                <a16:creationId xmlns:a16="http://schemas.microsoft.com/office/drawing/2014/main" id="{59D31A29-0E76-F844-B404-A7F3A9B15180}"/>
-              </a:ext>
-            </a:extLst>
-          </p:cNvPr>
-          <p:cNvSpPr>
-            <a:spLocks noGrp="1"/>
-          </p:cNvSpPr>
-          <p:nvPr>
-            <p:ph type="pic" sz="quarter" idx="4294967295"/>
-          </p:nvPr>
-        </p:nvSpPr>
-        <p:spPr>
-          <a:xfrm>
-            <a:off x="26700480" y="747212"/>
-            <a:ext cx="3116874" cy="5413122"/>
-          </a:xfrm>
-          <a:prstGeom prst="rect">
-            <a:avLst/>
-          </a:prstGeom>
-        </p:spPr>
-        <p:txBody>
-          <a:bodyPr/>
-          <a:lstStyle/>
-          <a:p>
-            <a:endParaRPr lang="en-US"/>
-          </a:p>
-        </p:txBody>
-      </p:sp>
-      <p:sp>
-        <p:nvSpPr>
-          <p:cNvPr id="12" name="Content Placeholder 2"/>
-          <p:cNvSpPr txBox="1">
-            <a:spLocks/>
-          </p:cNvSpPr>
-          <p:nvPr/>
-        </p:nvSpPr>
-        <p:spPr>
-          <a:xfrm>
-            <a:off x="23728971" y="28528137"/>
-            <a:ext cx="6853057" cy="997458"/>
-          </a:xfrm>
-          <a:prstGeom prst="rect">
-            <a:avLst/>
-          </a:prstGeom>
-          <a:noFill/>
-        </p:spPr>
-        <p:txBody>
-          <a:bodyPr lIns="77714" tIns="38857" rIns="77714" bIns="38857"/>
-          <a:lstStyle>
-            <a:lvl1pPr marL="582060" indent="-423316" algn="l" defTabSz="1828508" rtl="0" eaLnBrk="1" latinLnBrk="0" hangingPunct="1">
-              <a:spcBef>
-                <a:spcPct val="20000"/>
-              </a:spcBef>
-              <a:buFont typeface="Arial"/>
-              <a:buChar char="•"/>
-              <a:tabLst/>
-              <a:defRPr sz="5000" kern="1200">
-                <a:solidFill>
-                  <a:srgbClr val="FFFFFF"/>
-                </a:solidFill>
-                <a:latin typeface="+mn-lt"/>
-                <a:ea typeface="+mn-ea"/>
-                <a:cs typeface="+mn-cs"/>
-              </a:defRPr>
-            </a:lvl1pPr>
-            <a:lvl2pPr marL="2133259" indent="-609503" algn="l" defTabSz="1828508" rtl="0" eaLnBrk="1" latinLnBrk="0" hangingPunct="1">
-              <a:spcBef>
-                <a:spcPct val="20000"/>
-              </a:spcBef>
-              <a:buFont typeface="Arial"/>
-              <a:buChar char="–"/>
-              <a:defRPr sz="4000" kern="1200">
-                <a:solidFill>
-                  <a:srgbClr val="FFFFFF"/>
-                </a:solidFill>
-                <a:latin typeface="+mn-lt"/>
-                <a:ea typeface="+mn-ea"/>
-                <a:cs typeface="+mn-cs"/>
-              </a:defRPr>
-            </a:lvl2pPr>
-            <a:lvl3pPr marL="2590386" indent="-380939" algn="l" defTabSz="1828508" rtl="0" eaLnBrk="1" latinLnBrk="0" hangingPunct="1">
-              <a:spcBef>
-                <a:spcPct val="20000"/>
-              </a:spcBef>
-              <a:buFont typeface="Arial"/>
-              <a:buChar char="•"/>
-              <a:defRPr sz="3583" kern="1200">
-                <a:solidFill>
-                  <a:srgbClr val="FFFFFF"/>
-                </a:solidFill>
-                <a:latin typeface="+mn-lt"/>
-                <a:ea typeface="+mn-ea"/>
-                <a:cs typeface="+mn-cs"/>
-              </a:defRPr>
-            </a:lvl3pPr>
-            <a:lvl4pPr marL="3276076" indent="-380939" algn="l" defTabSz="1828508" rtl="0" eaLnBrk="1" latinLnBrk="0" hangingPunct="1">
-              <a:spcBef>
-                <a:spcPct val="20000"/>
-              </a:spcBef>
-              <a:buFont typeface="Arial"/>
-              <a:buChar char="–"/>
-              <a:defRPr sz="3000" kern="1200">
-                <a:solidFill>
-                  <a:srgbClr val="FFFFFF"/>
-                </a:solidFill>
-                <a:latin typeface="+mn-lt"/>
-                <a:ea typeface="+mn-ea"/>
-                <a:cs typeface="+mn-cs"/>
-              </a:defRPr>
-            </a:lvl4pPr>
-            <a:lvl5pPr marL="3657015" indent="-380939" algn="l" defTabSz="1828508" rtl="0" eaLnBrk="1" latinLnBrk="0" hangingPunct="1">
-              <a:spcBef>
-                <a:spcPct val="20000"/>
-              </a:spcBef>
-              <a:buFont typeface="Arial"/>
-              <a:buChar char="»"/>
-              <a:defRPr sz="3000" kern="1200">
-                <a:solidFill>
-                  <a:srgbClr val="FFFFFF"/>
-                </a:solidFill>
-                <a:latin typeface="+mn-lt"/>
-                <a:ea typeface="+mn-ea"/>
-                <a:cs typeface="+mn-cs"/>
-              </a:defRPr>
-            </a:lvl5pPr>
-            <a:lvl6pPr marL="10056790" indent="-914253" algn="l" defTabSz="1828508" rtl="0" eaLnBrk="1" latinLnBrk="0" hangingPunct="1">
-              <a:spcBef>
-                <a:spcPct val="20000"/>
-              </a:spcBef>
-              <a:buFont typeface="Arial"/>
-              <a:buChar char="•"/>
-              <a:defRPr sz="7083" kern="1200">
-                <a:solidFill>
-                  <a:schemeClr val="tx1"/>
-                </a:solidFill>
-                <a:latin typeface="+mn-lt"/>
-                <a:ea typeface="+mn-ea"/>
-                <a:cs typeface="+mn-cs"/>
-              </a:defRPr>
-            </a:lvl6pPr>
-            <a:lvl7pPr marL="11885298" indent="-914253" algn="l" defTabSz="1828508" rtl="0" eaLnBrk="1" latinLnBrk="0" hangingPunct="1">
-              <a:spcBef>
-                <a:spcPct val="20000"/>
-              </a:spcBef>
-              <a:buFont typeface="Arial"/>
-              <a:buChar char="•"/>
-              <a:defRPr sz="7083" kern="1200">
-                <a:solidFill>
-                  <a:schemeClr val="tx1"/>
-                </a:solidFill>
-                <a:latin typeface="+mn-lt"/>
-                <a:ea typeface="+mn-ea"/>
-                <a:cs typeface="+mn-cs"/>
-              </a:defRPr>
-            </a:lvl7pPr>
-            <a:lvl8pPr marL="13713806" indent="-914253" algn="l" defTabSz="1828508" rtl="0" eaLnBrk="1" latinLnBrk="0" hangingPunct="1">
-              <a:spcBef>
-                <a:spcPct val="20000"/>
-              </a:spcBef>
-              <a:buFont typeface="Arial"/>
-              <a:buChar char="•"/>
-              <a:defRPr sz="7083" kern="1200">
-                <a:solidFill>
-                  <a:schemeClr val="tx1"/>
-                </a:solidFill>
-                <a:latin typeface="+mn-lt"/>
-                <a:ea typeface="+mn-ea"/>
-                <a:cs typeface="+mn-cs"/>
-              </a:defRPr>
-            </a:lvl8pPr>
-            <a:lvl9pPr marL="15542312" indent="-914253" algn="l" defTabSz="1828508" rtl="0" eaLnBrk="1" latinLnBrk="0" hangingPunct="1">
-              <a:spcBef>
-                <a:spcPct val="20000"/>
-              </a:spcBef>
-              <a:buFont typeface="Arial"/>
-              <a:buChar char="•"/>
-              <a:defRPr sz="7083" kern="1200">
-                <a:solidFill>
-                  <a:schemeClr val="tx1"/>
-                </a:solidFill>
-                <a:latin typeface="+mn-lt"/>
-                <a:ea typeface="+mn-ea"/>
-                <a:cs typeface="+mn-cs"/>
-              </a:defRPr>
-            </a:lvl9pPr>
-          </a:lstStyle>
-          <a:p>
-            <a:pPr marL="134932" indent="0">
-              <a:buNone/>
-            </a:pPr>
-            <a:r>
-              <a:rPr lang="en-US" sz="3060" dirty="0"/>
-              <a:t>Add Your Logo and/or project info here</a:t>
-            </a:r>
-          </a:p>
-        </p:txBody>
-      </p:sp>
-      <p:sp>
-        <p:nvSpPr>
-          <p:cNvPr id="13" name="Content Placeholder 2"/>
-          <p:cNvSpPr txBox="1">
-            <a:spLocks/>
-          </p:cNvSpPr>
-          <p:nvPr/>
-        </p:nvSpPr>
-        <p:spPr>
-          <a:xfrm>
-            <a:off x="23728971" y="28992322"/>
-            <a:ext cx="6088380" cy="954278"/>
-          </a:xfrm>
-          <a:prstGeom prst="rect">
-            <a:avLst/>
-          </a:prstGeom>
-          <a:noFill/>
-        </p:spPr>
-        <p:txBody>
-          <a:bodyPr lIns="77714" tIns="38857" rIns="77714" bIns="38857"/>
-          <a:lstStyle>
-            <a:lvl1pPr marL="582060" indent="-423316" algn="l" defTabSz="1828508" rtl="0" eaLnBrk="1" latinLnBrk="0" hangingPunct="1">
-              <a:spcBef>
-                <a:spcPct val="20000"/>
-              </a:spcBef>
-              <a:buFont typeface="Arial"/>
-              <a:buChar char="•"/>
-              <a:tabLst/>
-              <a:defRPr sz="5000" kern="1200">
-                <a:solidFill>
-                  <a:srgbClr val="FFFFFF"/>
-                </a:solidFill>
-                <a:latin typeface="+mn-lt"/>
-                <a:ea typeface="+mn-ea"/>
-                <a:cs typeface="+mn-cs"/>
-              </a:defRPr>
-            </a:lvl1pPr>
-            <a:lvl2pPr marL="2133259" indent="-609503" algn="l" defTabSz="1828508" rtl="0" eaLnBrk="1" latinLnBrk="0" hangingPunct="1">
-              <a:spcBef>
-                <a:spcPct val="20000"/>
-              </a:spcBef>
-              <a:buFont typeface="Arial"/>
-              <a:buChar char="–"/>
-              <a:defRPr sz="4000" kern="1200">
-                <a:solidFill>
-                  <a:srgbClr val="FFFFFF"/>
-                </a:solidFill>
-                <a:latin typeface="+mn-lt"/>
-                <a:ea typeface="+mn-ea"/>
-                <a:cs typeface="+mn-cs"/>
-              </a:defRPr>
-            </a:lvl2pPr>
-            <a:lvl3pPr marL="2590386" indent="-380939" algn="l" defTabSz="1828508" rtl="0" eaLnBrk="1" latinLnBrk="0" hangingPunct="1">
-              <a:spcBef>
-                <a:spcPct val="20000"/>
-              </a:spcBef>
-              <a:buFont typeface="Arial"/>
-              <a:buChar char="•"/>
-              <a:defRPr sz="3583" kern="1200">
-                <a:solidFill>
-                  <a:srgbClr val="FFFFFF"/>
-                </a:solidFill>
-                <a:latin typeface="+mn-lt"/>
-                <a:ea typeface="+mn-ea"/>
-                <a:cs typeface="+mn-cs"/>
-              </a:defRPr>
-            </a:lvl3pPr>
-            <a:lvl4pPr marL="3276076" indent="-380939" algn="l" defTabSz="1828508" rtl="0" eaLnBrk="1" latinLnBrk="0" hangingPunct="1">
-              <a:spcBef>
-                <a:spcPct val="20000"/>
-              </a:spcBef>
-              <a:buFont typeface="Arial"/>
-              <a:buChar char="–"/>
-              <a:defRPr sz="3000" kern="1200">
-                <a:solidFill>
-                  <a:srgbClr val="FFFFFF"/>
-                </a:solidFill>
-                <a:latin typeface="+mn-lt"/>
-                <a:ea typeface="+mn-ea"/>
-                <a:cs typeface="+mn-cs"/>
-              </a:defRPr>
-            </a:lvl4pPr>
-            <a:lvl5pPr marL="3657015" indent="-380939" algn="l" defTabSz="1828508" rtl="0" eaLnBrk="1" latinLnBrk="0" hangingPunct="1">
-              <a:spcBef>
-                <a:spcPct val="20000"/>
-              </a:spcBef>
-              <a:buFont typeface="Arial"/>
-              <a:buChar char="»"/>
-              <a:defRPr sz="3000" kern="1200">
-                <a:solidFill>
-                  <a:srgbClr val="FFFFFF"/>
-                </a:solidFill>
-                <a:latin typeface="+mn-lt"/>
-                <a:ea typeface="+mn-ea"/>
-                <a:cs typeface="+mn-cs"/>
-              </a:defRPr>
-            </a:lvl5pPr>
-            <a:lvl6pPr marL="10056790" indent="-914253" algn="l" defTabSz="1828508" rtl="0" eaLnBrk="1" latinLnBrk="0" hangingPunct="1">
-              <a:spcBef>
-                <a:spcPct val="20000"/>
-              </a:spcBef>
-              <a:buFont typeface="Arial"/>
-              <a:buChar char="•"/>
-              <a:defRPr sz="7083" kern="1200">
-                <a:solidFill>
-                  <a:schemeClr val="tx1"/>
-                </a:solidFill>
-                <a:latin typeface="+mn-lt"/>
-                <a:ea typeface="+mn-ea"/>
-                <a:cs typeface="+mn-cs"/>
-              </a:defRPr>
-            </a:lvl6pPr>
-            <a:lvl7pPr marL="11885298" indent="-914253" algn="l" defTabSz="1828508" rtl="0" eaLnBrk="1" latinLnBrk="0" hangingPunct="1">
-              <a:spcBef>
-                <a:spcPct val="20000"/>
-              </a:spcBef>
-              <a:buFont typeface="Arial"/>
-              <a:buChar char="•"/>
-              <a:defRPr sz="7083" kern="1200">
-                <a:solidFill>
-                  <a:schemeClr val="tx1"/>
-                </a:solidFill>
-                <a:latin typeface="+mn-lt"/>
-                <a:ea typeface="+mn-ea"/>
-                <a:cs typeface="+mn-cs"/>
-              </a:defRPr>
-            </a:lvl7pPr>
-            <a:lvl8pPr marL="13713806" indent="-914253" algn="l" defTabSz="1828508" rtl="0" eaLnBrk="1" latinLnBrk="0" hangingPunct="1">
-              <a:spcBef>
-                <a:spcPct val="20000"/>
-              </a:spcBef>
-              <a:buFont typeface="Arial"/>
-              <a:buChar char="•"/>
-              <a:defRPr sz="7083" kern="1200">
-                <a:solidFill>
-                  <a:schemeClr val="tx1"/>
-                </a:solidFill>
-                <a:latin typeface="+mn-lt"/>
-                <a:ea typeface="+mn-ea"/>
-                <a:cs typeface="+mn-cs"/>
-              </a:defRPr>
-            </a:lvl8pPr>
-            <a:lvl9pPr marL="15542312" indent="-914253" algn="l" defTabSz="1828508" rtl="0" eaLnBrk="1" latinLnBrk="0" hangingPunct="1">
-              <a:spcBef>
-                <a:spcPct val="20000"/>
-              </a:spcBef>
-              <a:buFont typeface="Arial"/>
-              <a:buChar char="•"/>
-              <a:defRPr sz="7083" kern="1200">
-                <a:solidFill>
-                  <a:schemeClr val="tx1"/>
-                </a:solidFill>
-                <a:latin typeface="+mn-lt"/>
-                <a:ea typeface="+mn-ea"/>
-                <a:cs typeface="+mn-cs"/>
-              </a:defRPr>
-            </a:lvl9pPr>
-          </a:lstStyle>
-          <a:p>
-            <a:pPr marL="134932" indent="0">
-              <a:buNone/>
-            </a:pPr>
-            <a:r>
-              <a:rPr lang="en-US" sz="3060"/>
-              <a:t>Award ID#:</a:t>
-            </a:r>
-            <a:endParaRPr lang="en-US" sz="3060" dirty="0"/>
           </a:p>
         </p:txBody>
       </p:sp>
     </p:spTree>
     <p:extLst>
       <p:ext uri="{BB962C8B-B14F-4D97-AF65-F5344CB8AC3E}">
-        <p14:creationId xmlns:p14="http://schemas.microsoft.com/office/powerpoint/2010/main" val="950205223"/>
+        <p14:creationId xmlns:p14="http://schemas.microsoft.com/office/powerpoint/2010/main" val="2848909928"/>
       </p:ext>
     </p:extLst>
   </p:cSld>

--- a/assets/downloads/cici-UCSS-pi-poster-template-2026.pptx
+++ b/assets/downloads/cici-UCSS-pi-poster-template-2026.pptx
@@ -8,7 +8,7 @@
     <p:notesMasterId r:id="rId3"/>
   </p:notesMasterIdLst>
   <p:sldIdLst>
-    <p:sldId id="259" r:id="rId2"/>
+    <p:sldId id="260" r:id="rId2"/>
   </p:sldIdLst>
   <p:sldSz cx="31089600" cy="36576000"/>
   <p:notesSz cx="6858000" cy="9144000"/>
@@ -734,8 +734,8 @@
         </p:nvSpPr>
         <p:spPr>
           <a:xfrm>
-            <a:off x="11108827" y="25742482"/>
-            <a:ext cx="9137409" cy="7805686"/>
+            <a:off x="11108826" y="25569219"/>
+            <a:ext cx="9134856" cy="7808976"/>
           </a:xfrm>
           <a:prstGeom prst="rect">
             <a:avLst/>
@@ -969,8 +969,8 @@
         </p:nvSpPr>
         <p:spPr>
           <a:xfrm>
-            <a:off x="1510817" y="25742480"/>
-            <a:ext cx="9134856" cy="7805687"/>
+            <a:off x="1510816" y="25569216"/>
+            <a:ext cx="9134856" cy="7808976"/>
           </a:xfrm>
           <a:prstGeom prst="rect">
             <a:avLst/>
@@ -1090,8 +1090,8 @@
         </p:nvSpPr>
         <p:spPr>
           <a:xfrm>
-            <a:off x="20709390" y="25742479"/>
-            <a:ext cx="9137409" cy="7805687"/>
+            <a:off x="20709389" y="25569215"/>
+            <a:ext cx="9134856" cy="7808976"/>
           </a:xfrm>
           <a:prstGeom prst="rect">
             <a:avLst/>
@@ -1938,7 +1938,7 @@
           <p:cNvPr id="2" name="Title 1">
             <a:extLst>
               <a:ext uri="{FF2B5EF4-FFF2-40B4-BE49-F238E27FC236}">
-                <a16:creationId xmlns:a16="http://schemas.microsoft.com/office/drawing/2014/main" id="{1EA1E328-EE5E-38B7-AD8C-ADBFC6D51663}"/>
+                <a16:creationId xmlns:a16="http://schemas.microsoft.com/office/drawing/2014/main" id="{EE779594-E2E8-626D-AD2D-96ACA639AC7F}"/>
               </a:ext>
             </a:extLst>
           </p:cNvPr>
@@ -1963,7 +1963,7 @@
           <p:cNvPr id="3" name="Text Placeholder 2">
             <a:extLst>
               <a:ext uri="{FF2B5EF4-FFF2-40B4-BE49-F238E27FC236}">
-                <a16:creationId xmlns:a16="http://schemas.microsoft.com/office/drawing/2014/main" id="{C7C432B1-BD60-EBEE-66D7-C5404C23D6F8}"/>
+                <a16:creationId xmlns:a16="http://schemas.microsoft.com/office/drawing/2014/main" id="{0AD9ED75-8AC3-D80E-EBE4-AD705A1D7C2F}"/>
               </a:ext>
             </a:extLst>
           </p:cNvPr>
@@ -1988,7 +1988,7 @@
           <p:cNvPr id="4" name="Text Placeholder 3">
             <a:extLst>
               <a:ext uri="{FF2B5EF4-FFF2-40B4-BE49-F238E27FC236}">
-                <a16:creationId xmlns:a16="http://schemas.microsoft.com/office/drawing/2014/main" id="{1BCD15CA-DB36-4F33-EAD1-83F8B2B526DC}"/>
+                <a16:creationId xmlns:a16="http://schemas.microsoft.com/office/drawing/2014/main" id="{4DF2370B-064D-DE74-806D-760AF9B55D0C}"/>
               </a:ext>
             </a:extLst>
           </p:cNvPr>
@@ -2013,7 +2013,7 @@
           <p:cNvPr id="5" name="Content Placeholder 4">
             <a:extLst>
               <a:ext uri="{FF2B5EF4-FFF2-40B4-BE49-F238E27FC236}">
-                <a16:creationId xmlns:a16="http://schemas.microsoft.com/office/drawing/2014/main" id="{F70D050D-5713-B285-658D-100AFB1CD015}"/>
+                <a16:creationId xmlns:a16="http://schemas.microsoft.com/office/drawing/2014/main" id="{163E67A5-1FA1-BF60-E4C4-D5BAA776DD2B}"/>
               </a:ext>
             </a:extLst>
           </p:cNvPr>
@@ -2038,7 +2038,7 @@
           <p:cNvPr id="6" name="Content Placeholder 5">
             <a:extLst>
               <a:ext uri="{FF2B5EF4-FFF2-40B4-BE49-F238E27FC236}">
-                <a16:creationId xmlns:a16="http://schemas.microsoft.com/office/drawing/2014/main" id="{02FF7BD8-E4A7-4A81-FA43-9483E89E351B}"/>
+                <a16:creationId xmlns:a16="http://schemas.microsoft.com/office/drawing/2014/main" id="{ACB3636D-C030-A7EC-E67C-DDA6DE6E2F82}"/>
               </a:ext>
             </a:extLst>
           </p:cNvPr>
@@ -2063,7 +2063,7 @@
           <p:cNvPr id="7" name="Content Placeholder 6">
             <a:extLst>
               <a:ext uri="{FF2B5EF4-FFF2-40B4-BE49-F238E27FC236}">
-                <a16:creationId xmlns:a16="http://schemas.microsoft.com/office/drawing/2014/main" id="{64707CAA-87F4-7AB5-EBB1-ADC1E5599326}"/>
+                <a16:creationId xmlns:a16="http://schemas.microsoft.com/office/drawing/2014/main" id="{6D0C2D50-AEEF-EA55-E2B7-4982DC64BB5F}"/>
               </a:ext>
             </a:extLst>
           </p:cNvPr>
@@ -2088,7 +2088,7 @@
           <p:cNvPr id="8" name="Content Placeholder 7">
             <a:extLst>
               <a:ext uri="{FF2B5EF4-FFF2-40B4-BE49-F238E27FC236}">
-                <a16:creationId xmlns:a16="http://schemas.microsoft.com/office/drawing/2014/main" id="{DFA97EAE-DA94-4105-AEFE-B8F084CED2E4}"/>
+                <a16:creationId xmlns:a16="http://schemas.microsoft.com/office/drawing/2014/main" id="{3A9020DE-7702-90E0-A95A-F1B9A17E67AC}"/>
               </a:ext>
             </a:extLst>
           </p:cNvPr>
@@ -2113,7 +2113,7 @@
           <p:cNvPr id="9" name="Content Placeholder 8">
             <a:extLst>
               <a:ext uri="{FF2B5EF4-FFF2-40B4-BE49-F238E27FC236}">
-                <a16:creationId xmlns:a16="http://schemas.microsoft.com/office/drawing/2014/main" id="{B7ABBBA2-298A-E91F-534B-BF3E1BCAFBCD}"/>
+                <a16:creationId xmlns:a16="http://schemas.microsoft.com/office/drawing/2014/main" id="{F618BAA1-B292-484A-1805-3AD50078FC82}"/>
               </a:ext>
             </a:extLst>
           </p:cNvPr>
@@ -2138,7 +2138,7 @@
           <p:cNvPr id="10" name="Content Placeholder 9">
             <a:extLst>
               <a:ext uri="{FF2B5EF4-FFF2-40B4-BE49-F238E27FC236}">
-                <a16:creationId xmlns:a16="http://schemas.microsoft.com/office/drawing/2014/main" id="{90884754-4682-36A0-1CDF-AEEEE43D427B}"/>
+                <a16:creationId xmlns:a16="http://schemas.microsoft.com/office/drawing/2014/main" id="{1E6B8EF8-41EF-DABD-C116-00410B91A2C1}"/>
               </a:ext>
             </a:extLst>
           </p:cNvPr>
@@ -2161,7 +2161,7 @@
     </p:spTree>
     <p:extLst>
       <p:ext uri="{BB962C8B-B14F-4D97-AF65-F5344CB8AC3E}">
-        <p14:creationId xmlns:p14="http://schemas.microsoft.com/office/powerpoint/2010/main" val="2848909928"/>
+        <p14:creationId xmlns:p14="http://schemas.microsoft.com/office/powerpoint/2010/main" val="259309142"/>
       </p:ext>
     </p:extLst>
   </p:cSld>

--- a/assets/downloads/cici-UCSS-pi-poster-template-2026.pptx
+++ b/assets/downloads/cici-UCSS-pi-poster-template-2026.pptx
@@ -8,7 +8,7 @@
     <p:notesMasterId r:id="rId3"/>
   </p:notesMasterIdLst>
   <p:sldIdLst>
-    <p:sldId id="260" r:id="rId2"/>
+    <p:sldId id="261" r:id="rId2"/>
   </p:sldIdLst>
   <p:sldSz cx="31089600" cy="36576000"/>
   <p:notesSz cx="6858000" cy="9144000"/>
@@ -478,6 +478,90 @@
 </p:notesMaster>
 </file>
 
+<file path=ppt/notesSlides/notesSlide1.xml><?xml version="1.0" encoding="utf-8"?>
+<p:notes xmlns:a="http://schemas.openxmlformats.org/drawingml/2006/main" xmlns:r="http://schemas.openxmlformats.org/officeDocument/2006/relationships" xmlns:p="http://schemas.openxmlformats.org/presentationml/2006/main">
+  <p:cSld>
+    <p:spTree>
+      <p:nvGrpSpPr>
+        <p:cNvPr id="1" name=""/>
+        <p:cNvGrpSpPr/>
+        <p:nvPr/>
+      </p:nvGrpSpPr>
+      <p:grpSpPr>
+        <a:xfrm>
+          <a:off x="0" y="0"/>
+          <a:ext cx="0" cy="0"/>
+          <a:chOff x="0" y="0"/>
+          <a:chExt cx="0" cy="0"/>
+        </a:xfrm>
+      </p:grpSpPr>
+      <p:sp>
+        <p:nvSpPr>
+          <p:cNvPr id="2" name="Slide Image Placeholder 1"/>
+          <p:cNvSpPr>
+            <a:spLocks noGrp="1" noRot="1" noChangeAspect="1"/>
+          </p:cNvSpPr>
+          <p:nvPr>
+            <p:ph type="sldImg"/>
+          </p:nvPr>
+        </p:nvSpPr>
+        <p:spPr/>
+      </p:sp>
+      <p:sp>
+        <p:nvSpPr>
+          <p:cNvPr id="3" name="Notes Placeholder 2"/>
+          <p:cNvSpPr>
+            <a:spLocks noGrp="1"/>
+          </p:cNvSpPr>
+          <p:nvPr>
+            <p:ph type="body" idx="1"/>
+          </p:nvPr>
+        </p:nvSpPr>
+        <p:spPr/>
+        <p:txBody>
+          <a:bodyPr/>
+          <a:lstStyle/>
+          <a:p>
+            <a:endParaRPr lang="en-US" dirty="0"/>
+          </a:p>
+        </p:txBody>
+      </p:sp>
+      <p:sp>
+        <p:nvSpPr>
+          <p:cNvPr id="4" name="Slide Number Placeholder 3"/>
+          <p:cNvSpPr>
+            <a:spLocks noGrp="1"/>
+          </p:cNvSpPr>
+          <p:nvPr>
+            <p:ph type="sldNum" sz="quarter" idx="5"/>
+          </p:nvPr>
+        </p:nvSpPr>
+        <p:spPr/>
+        <p:txBody>
+          <a:bodyPr/>
+          <a:lstStyle/>
+          <a:p>
+            <a:fld id="{229E78B9-159C-0E4F-9C03-98278BC3000C}" type="slidenum">
+              <a:rPr lang="en-US" smtClean="0"/>
+              <a:t>1</a:t>
+            </a:fld>
+            <a:endParaRPr lang="en-US"/>
+          </a:p>
+        </p:txBody>
+      </p:sp>
+    </p:spTree>
+    <p:extLst>
+      <p:ext uri="{BB962C8B-B14F-4D97-AF65-F5344CB8AC3E}">
+        <p14:creationId xmlns:p14="http://schemas.microsoft.com/office/powerpoint/2010/main" val="2512128235"/>
+      </p:ext>
+    </p:extLst>
+  </p:cSld>
+  <p:clrMapOvr>
+    <a:masterClrMapping/>
+  </p:clrMapOvr>
+</p:notes>
+</file>
+
 <file path=ppt/slideLayouts/slideLayout1.xml><?xml version="1.0" encoding="utf-8"?>
 <p:sldLayout xmlns:a="http://schemas.openxmlformats.org/drawingml/2006/main" xmlns:r="http://schemas.openxmlformats.org/officeDocument/2006/relationships" xmlns:p="http://schemas.openxmlformats.org/presentationml/2006/main" preserve="1" userDrawn="1">
   <p:cSld name="Two Content">
@@ -734,7 +818,7 @@
         </p:nvSpPr>
         <p:spPr>
           <a:xfrm>
-            <a:off x="11108826" y="25569219"/>
+            <a:off x="11110103" y="25569219"/>
             <a:ext cx="9134856" cy="7808976"/>
           </a:xfrm>
           <a:prstGeom prst="rect">
@@ -1938,7 +2022,7 @@
           <p:cNvPr id="2" name="Title 1">
             <a:extLst>
               <a:ext uri="{FF2B5EF4-FFF2-40B4-BE49-F238E27FC236}">
-                <a16:creationId xmlns:a16="http://schemas.microsoft.com/office/drawing/2014/main" id="{EE779594-E2E8-626D-AD2D-96ACA639AC7F}"/>
+                <a16:creationId xmlns:a16="http://schemas.microsoft.com/office/drawing/2014/main" id="{E632D6DF-4AC8-D22F-FCAC-26D258264BA9}"/>
               </a:ext>
             </a:extLst>
           </p:cNvPr>
@@ -1954,7 +2038,7 @@
           <a:bodyPr/>
           <a:lstStyle/>
           <a:p>
-            <a:endParaRPr lang="en-US"/>
+            <a:endParaRPr lang="en-US" dirty="0"/>
           </a:p>
         </p:txBody>
       </p:sp>
@@ -1963,7 +2047,7 @@
           <p:cNvPr id="3" name="Text Placeholder 2">
             <a:extLst>
               <a:ext uri="{FF2B5EF4-FFF2-40B4-BE49-F238E27FC236}">
-                <a16:creationId xmlns:a16="http://schemas.microsoft.com/office/drawing/2014/main" id="{0AD9ED75-8AC3-D80E-EBE4-AD705A1D7C2F}"/>
+                <a16:creationId xmlns:a16="http://schemas.microsoft.com/office/drawing/2014/main" id="{D57B817F-95B6-2DD9-6DBF-056261FA7364}"/>
               </a:ext>
             </a:extLst>
           </p:cNvPr>
@@ -1988,7 +2072,7 @@
           <p:cNvPr id="4" name="Text Placeholder 3">
             <a:extLst>
               <a:ext uri="{FF2B5EF4-FFF2-40B4-BE49-F238E27FC236}">
-                <a16:creationId xmlns:a16="http://schemas.microsoft.com/office/drawing/2014/main" id="{4DF2370B-064D-DE74-806D-760AF9B55D0C}"/>
+                <a16:creationId xmlns:a16="http://schemas.microsoft.com/office/drawing/2014/main" id="{1BA13747-52DF-1333-B59E-7A10AAABDFA7}"/>
               </a:ext>
             </a:extLst>
           </p:cNvPr>
@@ -2013,7 +2097,7 @@
           <p:cNvPr id="5" name="Content Placeholder 4">
             <a:extLst>
               <a:ext uri="{FF2B5EF4-FFF2-40B4-BE49-F238E27FC236}">
-                <a16:creationId xmlns:a16="http://schemas.microsoft.com/office/drawing/2014/main" id="{163E67A5-1FA1-BF60-E4C4-D5BAA776DD2B}"/>
+                <a16:creationId xmlns:a16="http://schemas.microsoft.com/office/drawing/2014/main" id="{C2E84FC2-A1BD-64EE-DDDA-A6173F270740}"/>
               </a:ext>
             </a:extLst>
           </p:cNvPr>
@@ -2038,7 +2122,7 @@
           <p:cNvPr id="6" name="Content Placeholder 5">
             <a:extLst>
               <a:ext uri="{FF2B5EF4-FFF2-40B4-BE49-F238E27FC236}">
-                <a16:creationId xmlns:a16="http://schemas.microsoft.com/office/drawing/2014/main" id="{ACB3636D-C030-A7EC-E67C-DDA6DE6E2F82}"/>
+                <a16:creationId xmlns:a16="http://schemas.microsoft.com/office/drawing/2014/main" id="{496D4A30-E925-0BC5-4D66-C7D38BFDDB70}"/>
               </a:ext>
             </a:extLst>
           </p:cNvPr>
@@ -2063,7 +2147,7 @@
           <p:cNvPr id="7" name="Content Placeholder 6">
             <a:extLst>
               <a:ext uri="{FF2B5EF4-FFF2-40B4-BE49-F238E27FC236}">
-                <a16:creationId xmlns:a16="http://schemas.microsoft.com/office/drawing/2014/main" id="{6D0C2D50-AEEF-EA55-E2B7-4982DC64BB5F}"/>
+                <a16:creationId xmlns:a16="http://schemas.microsoft.com/office/drawing/2014/main" id="{F743DE6E-F9DF-575B-A729-013AB9375126}"/>
               </a:ext>
             </a:extLst>
           </p:cNvPr>
@@ -2088,7 +2172,7 @@
           <p:cNvPr id="8" name="Content Placeholder 7">
             <a:extLst>
               <a:ext uri="{FF2B5EF4-FFF2-40B4-BE49-F238E27FC236}">
-                <a16:creationId xmlns:a16="http://schemas.microsoft.com/office/drawing/2014/main" id="{3A9020DE-7702-90E0-A95A-F1B9A17E67AC}"/>
+                <a16:creationId xmlns:a16="http://schemas.microsoft.com/office/drawing/2014/main" id="{8B6261E0-41A1-BD4D-11B6-146E4BB64AD6}"/>
               </a:ext>
             </a:extLst>
           </p:cNvPr>
@@ -2113,7 +2197,7 @@
           <p:cNvPr id="9" name="Content Placeholder 8">
             <a:extLst>
               <a:ext uri="{FF2B5EF4-FFF2-40B4-BE49-F238E27FC236}">
-                <a16:creationId xmlns:a16="http://schemas.microsoft.com/office/drawing/2014/main" id="{F618BAA1-B292-484A-1805-3AD50078FC82}"/>
+                <a16:creationId xmlns:a16="http://schemas.microsoft.com/office/drawing/2014/main" id="{28B6B94A-CE84-A933-A49D-5EF97572A742}"/>
               </a:ext>
             </a:extLst>
           </p:cNvPr>
@@ -2138,7 +2222,7 @@
           <p:cNvPr id="10" name="Content Placeholder 9">
             <a:extLst>
               <a:ext uri="{FF2B5EF4-FFF2-40B4-BE49-F238E27FC236}">
-                <a16:creationId xmlns:a16="http://schemas.microsoft.com/office/drawing/2014/main" id="{1E6B8EF8-41EF-DABD-C116-00410B91A2C1}"/>
+                <a16:creationId xmlns:a16="http://schemas.microsoft.com/office/drawing/2014/main" id="{59E52A3C-12C6-FC8C-A4CF-89DF7D60CF48}"/>
               </a:ext>
             </a:extLst>
           </p:cNvPr>
@@ -2161,7 +2245,7 @@
     </p:spTree>
     <p:extLst>
       <p:ext uri="{BB962C8B-B14F-4D97-AF65-F5344CB8AC3E}">
-        <p14:creationId xmlns:p14="http://schemas.microsoft.com/office/powerpoint/2010/main" val="259309142"/>
+        <p14:creationId xmlns:p14="http://schemas.microsoft.com/office/powerpoint/2010/main" val="97073948"/>
       </p:ext>
     </p:extLst>
   </p:cSld>
